--- a/Q-Shield.pptx
+++ b/Q-Shield.pptx
@@ -24041,13 +24041,40 @@
               </a:spcBef>
             </a:pPr>
             <a:r>
-              <a:rPr sz="1600" dirty="0">
+              <a:rPr sz="1600">
                 <a:solidFill>
                   <a:srgbClr val="999999"/>
                 </a:solidFill>
                 <a:latin typeface="Roboto"/>
               </a:rPr>
-              <a:t>Hackathon 2027  |  DigiCert Trust Lifecycle Manager</a:t>
+              <a:t>Hackathon 202</a:t>
+            </a:r>
+            <a:r>
+              <a:rPr lang="en-US" sz="1600">
+                <a:solidFill>
+                  <a:srgbClr val="999999"/>
+                </a:solidFill>
+                <a:latin typeface="Roboto"/>
+              </a:rPr>
+              <a:t>6</a:t>
+            </a:r>
+            <a:r>
+              <a:rPr sz="1600">
+                <a:solidFill>
+                  <a:srgbClr val="999999"/>
+                </a:solidFill>
+                <a:latin typeface="Roboto"/>
+              </a:rPr>
+              <a:t>  </a:t>
+            </a:r>
+            <a:r>
+              <a:rPr sz="1600" dirty="0">
+                <a:solidFill>
+                  <a:srgbClr val="999999"/>
+                </a:solidFill>
+                <a:latin typeface="Roboto"/>
+              </a:rPr>
+              <a:t>|  DigiCert Trust Lifecycle Manager</a:t>
             </a:r>
           </a:p>
           <a:p>
@@ -26253,7 +26280,7 @@
               </a:spcBef>
             </a:pPr>
             <a:r>
-              <a:rPr sz="1400">
+              <a:rPr sz="1400" dirty="0">
                 <a:solidFill>
                   <a:srgbClr val="609BCE"/>
                 </a:solidFill>
@@ -26269,7 +26296,7 @@
               </a:spcBef>
             </a:pPr>
             <a:r>
-              <a:rPr sz="1400">
+              <a:rPr sz="1400" dirty="0">
                 <a:solidFill>
                   <a:srgbClr val="609BCE"/>
                 </a:solidFill>
@@ -26285,7 +26312,7 @@
               </a:spcBef>
             </a:pPr>
             <a:r>
-              <a:rPr sz="1400">
+              <a:rPr sz="1400" dirty="0">
                 <a:solidFill>
                   <a:srgbClr val="609BCE"/>
                 </a:solidFill>
@@ -26301,7 +26328,7 @@
               </a:spcBef>
             </a:pPr>
             <a:r>
-              <a:rPr sz="1400">
+              <a:rPr sz="1400" dirty="0">
                 <a:solidFill>
                   <a:srgbClr val="609BCE"/>
                 </a:solidFill>
@@ -26316,7 +26343,7 @@
                 <a:spcPts val="800"/>
               </a:spcBef>
             </a:pPr>
-            <a:endParaRPr sz="1400">
+            <a:endParaRPr sz="1400" dirty="0">
               <a:solidFill>
                 <a:srgbClr val="609BCE"/>
               </a:solidFill>
@@ -26330,7 +26357,7 @@
               </a:spcBef>
             </a:pPr>
             <a:r>
-              <a:rPr sz="1400" b="1">
+              <a:rPr sz="1400" b="1" dirty="0">
                 <a:solidFill>
                   <a:srgbClr val="FFFFFF"/>
                 </a:solidFill>
@@ -27913,7 +27940,7 @@
         </p:nvSpPr>
         <p:spPr>
           <a:xfrm>
-            <a:off x="457200" y="2926080"/>
+            <a:off x="493059" y="2579336"/>
             <a:ext cx="5394960" cy="3474720"/>
           </a:xfrm>
           <a:prstGeom prst="roundRect">
@@ -27961,7 +27988,7 @@
         </p:nvSpPr>
         <p:spPr>
           <a:xfrm>
-            <a:off x="731520" y="3154680"/>
+            <a:off x="767379" y="2807936"/>
             <a:ext cx="4846320" cy="365760"/>
           </a:xfrm>
           <a:prstGeom prst="rect">
@@ -27995,7 +28022,7 @@
         </p:nvSpPr>
         <p:spPr>
           <a:xfrm>
-            <a:off x="731520" y="3657600"/>
+            <a:off x="767379" y="3310856"/>
             <a:ext cx="4846320" cy="2743200"/>
           </a:xfrm>
           <a:prstGeom prst="rect">
@@ -28114,7 +28141,7 @@
         </p:nvSpPr>
         <p:spPr>
           <a:xfrm>
-            <a:off x="6126480" y="2926080"/>
+            <a:off x="6162339" y="2579336"/>
             <a:ext cx="5394960" cy="3474720"/>
           </a:xfrm>
           <a:prstGeom prst="roundRect">
@@ -28162,7 +28189,7 @@
         </p:nvSpPr>
         <p:spPr>
           <a:xfrm>
-            <a:off x="6400800" y="3154680"/>
+            <a:off x="6436659" y="2807936"/>
             <a:ext cx="4846320" cy="365760"/>
           </a:xfrm>
           <a:prstGeom prst="rect">
@@ -28196,7 +28223,7 @@
         </p:nvSpPr>
         <p:spPr>
           <a:xfrm>
-            <a:off x="6400800" y="3657600"/>
+            <a:off x="6436659" y="3310856"/>
             <a:ext cx="4846320" cy="2743200"/>
           </a:xfrm>
           <a:prstGeom prst="rect">
@@ -28303,6 +28330,46 @@
                 <a:latin typeface="Roboto"/>
               </a:rPr>
               <a:t>✓  5 industry verticals: Medical, Auto, Industrial, Smart Home, Enterprise</a:t>
+            </a:r>
+          </a:p>
+        </p:txBody>
+      </p:sp>
+      <p:sp>
+        <p:nvSpPr>
+          <p:cNvPr id="17" name="TextBox Source">
+            <a:extLst>
+              <a:ext uri="{FF2B5EF4-FFF2-40B4-BE49-F238E27FC236}">
+                <a16:creationId xmlns:a16="http://schemas.microsoft.com/office/drawing/2014/main" id="{A78BBB39-5165-4CE8-5F38-29A3C01AE6C8}"/>
+              </a:ext>
+            </a:extLst>
+          </p:cNvPr>
+          <p:cNvSpPr txBox="1"/>
+          <p:nvPr/>
+        </p:nvSpPr>
+        <p:spPr>
+          <a:xfrm>
+            <a:off x="6217920" y="6284829"/>
+            <a:ext cx="5124236" cy="230832"/>
+          </a:xfrm>
+          <a:prstGeom prst="rect">
+            <a:avLst/>
+          </a:prstGeom>
+          <a:noFill/>
+        </p:spPr>
+        <p:txBody>
+          <a:bodyPr wrap="square">
+            <a:spAutoFit/>
+          </a:bodyPr>
+          <a:lstStyle/>
+          <a:p>
+            <a:r>
+              <a:rPr sz="900" i="1" dirty="0">
+                <a:solidFill>
+                  <a:srgbClr val="999999"/>
+                </a:solidFill>
+                <a:latin typeface="Roboto"/>
+              </a:rPr>
+              <a:t>Sources: NSA CNSA 2.0 Advisory (2022), NIST PQC Standards (2024), DigiCert IoT Security Report</a:t>
             </a:r>
           </a:p>
         </p:txBody>
@@ -28372,7 +28439,9 @@
         </p:nvSpPr>
         <p:spPr/>
         <p:txBody>
-          <a:bodyPr/>
+          <a:bodyPr>
+            <a:normAutofit fontScale="25000" lnSpcReduction="20000"/>
+          </a:bodyPr>
           <a:lstStyle/>
           <a:p>
             <a:pPr algn="ctr"/>
@@ -28429,7 +28498,7 @@
         <p:spPr>
           <a:xfrm>
             <a:off x="1828800" y="4572000"/>
-            <a:ext cx="8503920" cy="914400"/>
+            <a:ext cx="8503920" cy="738664"/>
           </a:xfrm>
           <a:prstGeom prst="rect">
             <a:avLst/>
@@ -28444,7 +28513,7 @@
           <a:p>
             <a:pPr algn="ctr"/>
             <a:r>
-              <a:rPr sz="1800" b="1">
+              <a:rPr sz="1800" b="1" dirty="0">
                 <a:solidFill>
                   <a:srgbClr val="609BCE"/>
                 </a:solidFill>
@@ -28460,14 +28529,29 @@
               </a:spcBef>
             </a:pPr>
             <a:r>
-              <a:rPr sz="1400">
+              <a:rPr sz="1400" dirty="0">
                 <a:solidFill>
                   <a:srgbClr val="999999"/>
                 </a:solidFill>
                 <a:latin typeface="Roboto"/>
               </a:rPr>
-              <a:t>Live Demo Available  |  DigiCert Hackathon 2027</a:t>
-            </a:r>
+              <a:t>Live Demo Available  |  DigiCert Hackathon 202</a:t>
+            </a:r>
+            <a:r>
+              <a:rPr lang="en-US" sz="1400" dirty="0">
+                <a:solidFill>
+                  <a:srgbClr val="999999"/>
+                </a:solidFill>
+                <a:latin typeface="Roboto"/>
+              </a:rPr>
+              <a:t>6</a:t>
+            </a:r>
+            <a:endParaRPr sz="1400" dirty="0">
+              <a:solidFill>
+                <a:srgbClr val="999999"/>
+              </a:solidFill>
+              <a:latin typeface="Roboto"/>
+            </a:endParaRPr>
           </a:p>
         </p:txBody>
       </p:sp>

--- a/Q-Shield.pptx
+++ b/Q-Shield.pptx
@@ -22,25 +22,18 @@
   <p:notesSz cx="6858000" cy="9144000"/>
   <p:embeddedFontLst>
     <p:embeddedFont>
-      <p:font typeface="Aptos" panose="020B0004020202020204" pitchFamily="34" charset="0"/>
+      <p:font typeface="Roboto" panose="02000000000000000000" pitchFamily="2" charset="0"/>
       <p:regular r:id="rId12"/>
       <p:bold r:id="rId13"/>
       <p:italic r:id="rId14"/>
       <p:boldItalic r:id="rId15"/>
     </p:embeddedFont>
     <p:embeddedFont>
-      <p:font typeface="Roboto" panose="02000000000000000000" pitchFamily="2" charset="0"/>
+      <p:font typeface="Roboto Condensed" panose="02000000000000000000" pitchFamily="2" charset="0"/>
       <p:regular r:id="rId16"/>
       <p:bold r:id="rId17"/>
       <p:italic r:id="rId18"/>
       <p:boldItalic r:id="rId19"/>
-    </p:embeddedFont>
-    <p:embeddedFont>
-      <p:font typeface="Roboto Condensed" panose="02000000000000000000" pitchFamily="2" charset="0"/>
-      <p:regular r:id="rId20"/>
-      <p:bold r:id="rId21"/>
-      <p:italic r:id="rId22"/>
-      <p:boldItalic r:id="rId23"/>
     </p:embeddedFont>
   </p:embeddedFontLst>
   <p:defaultTextStyle>
@@ -24479,7 +24472,7 @@
           <a:p>
             <a:pPr algn="ctr"/>
             <a:r>
-              <a:rPr sz="1400">
+              <a:rPr sz="1400" dirty="0">
                 <a:solidFill>
                   <a:srgbClr val="CCCCCC"/>
                 </a:solidFill>
@@ -24499,7 +24492,7 @@
         </p:nvSpPr>
         <p:spPr>
           <a:xfrm>
-            <a:off x="457200" y="3108960"/>
+            <a:off x="498763" y="2734888"/>
             <a:ext cx="3520440" cy="3108960"/>
           </a:xfrm>
           <a:prstGeom prst="roundRect">
@@ -24547,7 +24540,7 @@
         </p:nvSpPr>
         <p:spPr>
           <a:xfrm>
-            <a:off x="685800" y="3383280"/>
+            <a:off x="727363" y="3009208"/>
             <a:ext cx="3063240" cy="457200"/>
           </a:xfrm>
           <a:prstGeom prst="rect">
@@ -24581,7 +24574,7 @@
         </p:nvSpPr>
         <p:spPr>
           <a:xfrm>
-            <a:off x="685800" y="3931920"/>
+            <a:off x="727363" y="3557848"/>
             <a:ext cx="3063240" cy="2011680"/>
           </a:xfrm>
           <a:prstGeom prst="rect">
@@ -24615,7 +24608,7 @@
         </p:nvSpPr>
         <p:spPr>
           <a:xfrm>
-            <a:off x="4251960" y="3108960"/>
+            <a:off x="4293523" y="2734888"/>
             <a:ext cx="3520440" cy="3108960"/>
           </a:xfrm>
           <a:prstGeom prst="roundRect">
@@ -24663,7 +24656,7 @@
         </p:nvSpPr>
         <p:spPr>
           <a:xfrm>
-            <a:off x="4480560" y="3383280"/>
+            <a:off x="4522123" y="3009208"/>
             <a:ext cx="3063240" cy="457200"/>
           </a:xfrm>
           <a:prstGeom prst="rect">
@@ -24697,7 +24690,7 @@
         </p:nvSpPr>
         <p:spPr>
           <a:xfrm>
-            <a:off x="4480560" y="3931920"/>
+            <a:off x="4522123" y="3557848"/>
             <a:ext cx="3063240" cy="2011680"/>
           </a:xfrm>
           <a:prstGeom prst="rect">
@@ -24731,7 +24724,7 @@
         </p:nvSpPr>
         <p:spPr>
           <a:xfrm>
-            <a:off x="8046720" y="3108960"/>
+            <a:off x="8088283" y="2734888"/>
             <a:ext cx="3520440" cy="3108960"/>
           </a:xfrm>
           <a:prstGeom prst="roundRect">
@@ -24779,7 +24772,7 @@
         </p:nvSpPr>
         <p:spPr>
           <a:xfrm>
-            <a:off x="8275320" y="3383280"/>
+            <a:off x="8316883" y="3009208"/>
             <a:ext cx="3063240" cy="457200"/>
           </a:xfrm>
           <a:prstGeom prst="rect">
@@ -24813,7 +24806,7 @@
         </p:nvSpPr>
         <p:spPr>
           <a:xfrm>
-            <a:off x="8275320" y="3931920"/>
+            <a:off x="8316883" y="3557848"/>
             <a:ext cx="3063240" cy="2011680"/>
           </a:xfrm>
           <a:prstGeom prst="rect">
@@ -25166,13 +25159,31 @@
               </a:spcAft>
             </a:pPr>
             <a:r>
-              <a:rPr sz="1400">
+              <a:rPr sz="1400" dirty="0">
                 <a:solidFill>
                   <a:srgbClr val="CCCCCC"/>
                 </a:solidFill>
                 <a:latin typeface="Roboto"/>
               </a:rPr>
-              <a:t>•  TrustEdge Agent for capable devices</a:t>
+              <a:t>•  </a:t>
+            </a:r>
+            <a:r>
+              <a:rPr sz="1400" dirty="0" err="1">
+                <a:solidFill>
+                  <a:srgbClr val="CCCCCC"/>
+                </a:solidFill>
+                <a:latin typeface="Roboto"/>
+              </a:rPr>
+              <a:t>TrustEdge</a:t>
+            </a:r>
+            <a:r>
+              <a:rPr sz="1400" dirty="0">
+                <a:solidFill>
+                  <a:srgbClr val="CCCCCC"/>
+                </a:solidFill>
+                <a:latin typeface="Roboto"/>
+              </a:rPr>
+              <a:t> Agent for capable devices</a:t>
             </a:r>
           </a:p>
           <a:p>
@@ -25185,7 +25196,7 @@
               </a:spcAft>
             </a:pPr>
             <a:r>
-              <a:rPr sz="1400">
+              <a:rPr sz="1400" dirty="0">
                 <a:solidFill>
                   <a:srgbClr val="CCCCCC"/>
                 </a:solidFill>
@@ -25204,7 +25215,7 @@
               </a:spcAft>
             </a:pPr>
             <a:r>
-              <a:rPr sz="1400">
+              <a:rPr sz="1400" dirty="0">
                 <a:solidFill>
                   <a:srgbClr val="CCCCCC"/>
                 </a:solidFill>
@@ -25223,7 +25234,7 @@
               </a:spcAft>
             </a:pPr>
             <a:r>
-              <a:rPr sz="1400">
+              <a:rPr sz="1400" dirty="0">
                 <a:solidFill>
                   <a:srgbClr val="CCCCCC"/>
                 </a:solidFill>
@@ -25475,7 +25486,7 @@
               </a:spcAft>
             </a:pPr>
             <a:r>
-              <a:rPr sz="1400">
+              <a:rPr sz="1400" dirty="0">
                 <a:solidFill>
                   <a:srgbClr val="CCCCCC"/>
                 </a:solidFill>
@@ -25494,7 +25505,7 @@
               </a:spcAft>
             </a:pPr>
             <a:r>
-              <a:rPr sz="1400">
+              <a:rPr sz="1400" dirty="0">
                 <a:solidFill>
                   <a:srgbClr val="CCCCCC"/>
                 </a:solidFill>
@@ -25513,7 +25524,7 @@
               </a:spcAft>
             </a:pPr>
             <a:r>
-              <a:rPr sz="1400">
+              <a:rPr sz="1400" dirty="0">
                 <a:solidFill>
                   <a:srgbClr val="CCCCCC"/>
                 </a:solidFill>
@@ -25532,7 +25543,7 @@
               </a:spcAft>
             </a:pPr>
             <a:r>
-              <a:rPr sz="1400">
+              <a:rPr sz="1400" dirty="0">
                 <a:solidFill>
                   <a:srgbClr val="CCCCCC"/>
                 </a:solidFill>
@@ -25975,13 +25986,22 @@
           <a:lstStyle/>
           <a:p>
             <a:r>
-              <a:rPr sz="2200" b="1">
+              <a:rPr sz="2200" b="1" dirty="0" err="1">
                 <a:solidFill>
                   <a:srgbClr val="609BCE"/>
                 </a:solidFill>
                 <a:latin typeface="Roboto"/>
               </a:rPr>
-              <a:t>TrustEdge Agent</a:t>
+              <a:t>TrustEdge</a:t>
+            </a:r>
+            <a:r>
+              <a:rPr sz="2200" b="1" dirty="0">
+                <a:solidFill>
+                  <a:srgbClr val="609BCE"/>
+                </a:solidFill>
+                <a:latin typeface="Roboto"/>
+              </a:rPr>
+              <a:t> Agent</a:t>
             </a:r>
           </a:p>
         </p:txBody>
@@ -26207,7 +26227,7 @@
           <a:lstStyle/>
           <a:p>
             <a:r>
-              <a:rPr sz="2200" b="1">
+              <a:rPr sz="2200" b="1" dirty="0">
                 <a:solidFill>
                   <a:srgbClr val="E5753C"/>
                 </a:solidFill>
@@ -27743,7 +27763,7 @@
           <a:p>
             <a:pPr algn="ctr"/>
             <a:r>
-              <a:rPr sz="4400" b="1">
+              <a:rPr sz="4400" b="1" dirty="0">
                 <a:solidFill>
                   <a:srgbClr val="FFFFFF"/>
                 </a:solidFill>
